--- a/NOVA_GDC_Training_v3.pptx
+++ b/NOVA_GDC_Training_v3.pptx
@@ -5347,7 +5347,7 @@
                 <a:ea typeface="Microsoft YaHei" pitchFamily="34" charset="-122"/>
                 <a:cs typeface="Microsoft YaHei" pitchFamily="34" charset="-120"/>
               </a:rPr>
-              <a:t>8大核心功能模块 | 实质性分析程序 / 细节测试 / 样本录入 / 数据整理 / 信息查询</a:t>
+              <a:t>6大核心功能模块 | 实质性分析程序 / 细节测试 / 样本录入 / 数据整理 / 信息查询</a:t>
             </a:r>
             <a:endParaRPr lang="en-US" sz="1500" dirty="0"/>
           </a:p>
@@ -5450,6 +5450,10 @@
           </a:solidFill>
           <a:ln/>
         </p:spPr>
+        <p:txBody>
+          <a:bodyPr/>
+          <a:p/>
+        </p:txBody>
       </p:sp>
       <p:sp>
         <p:nvSpPr>
@@ -5541,6 +5545,10 @@
           </a:solidFill>
           <a:ln/>
         </p:spPr>
+        <p:txBody>
+          <a:bodyPr/>
+          <a:p/>
+        </p:txBody>
       </p:sp>
       <p:sp>
         <p:nvSpPr>
@@ -5692,9 +5700,69 @@
                 <a:ea typeface="Microsoft YaHei" pitchFamily="34" charset="-122"/>
                 <a:cs typeface="Microsoft YaHei" pitchFamily="34" charset="-120"/>
               </a:rPr>
-              <a:t>实质性分析程序要求你做趋势分析、比率分析、合理性测试。客户给你12个月的收入明细，你要算同比、环比、找出异常月份并标注原因。</a:t>
+              <a:t>F04 Excel表格处理 — 功能概览</a:t>
             </a:r>
             <a:endParaRPr lang="en-US" sz="1500" dirty="0"/>
+          </a:p>
+          <a:p>
+            <a:r>
+              <a:t/>
+            </a:r>
+          </a:p>
+          <a:p>
+            <a:r>
+              <a:t>NOVA可以帮你快速生成常用的Excel分析模板：</a:t>
+            </a:r>
+          </a:p>
+          <a:p>
+            <a:r>
+              <a:t/>
+            </a:r>
+          </a:p>
+          <a:p>
+            <a:r>
+              <a:t>• 趋势分析模板——输入月份和收入数据，自动计算同比环比和毛利率</a:t>
+            </a:r>
+          </a:p>
+          <a:p>
+            <a:r>
+              <a:t>• 数据匹配工具——两列数据快速匹配合并，标记差异项</a:t>
+            </a:r>
+          </a:p>
+          <a:p>
+            <a:r>
+              <a:t>• 抽样计算表——MUS货币单位抽样，自动算样本量和选样</a:t>
+            </a:r>
+          </a:p>
+          <a:p>
+            <a:r>
+              <a:t>• 异常筛选——按条件标记超出范围的数据点</a:t>
+            </a:r>
+          </a:p>
+          <a:p>
+            <a:r>
+              <a:t/>
+            </a:r>
+          </a:p>
+          <a:p>
+            <a:r>
+              <a:t>一句话：当你需要做数据分析或数据匹配时，告诉NOVA你的数据格式，</a:t>
+            </a:r>
+          </a:p>
+          <a:p>
+            <a:r>
+              <a:t>它直接生成带公式的Excel模板，你只需要填入数据、验算结果。</a:t>
+            </a:r>
+          </a:p>
+          <a:p>
+            <a:r>
+              <a:t/>
+            </a:r>
+          </a:p>
+          <a:p>
+            <a:r>
+              <a:t>注意：公式一定要验算！随机挑3行数据手工核对，确保引用范围没错。</a:t>
+            </a:r>
           </a:p>
         </p:txBody>
       </p:sp>
@@ -5731,9 +5799,69 @@
                 <a:ea typeface="Microsoft YaHei" pitchFamily="34" charset="-122"/>
                 <a:cs typeface="Microsoft YaHei" pitchFamily="34" charset="-120"/>
               </a:rPr>
-              <a:t>细节测试要求你计算抽样量、随机选样、生成样本清单。手工建公式不仅慢，而且SUM范围写错、VLOOKUP引用错位这类小错误一旦发生，整个底稿都要推翻重来。</a:t>
+              <a:t>F04 Excel表格处理 — 功能概览</a:t>
             </a:r>
             <a:endParaRPr lang="en-US" sz="1500" dirty="0"/>
+          </a:p>
+          <a:p>
+            <a:r>
+              <a:t/>
+            </a:r>
+          </a:p>
+          <a:p>
+            <a:r>
+              <a:t>NOVA可以帮你快速生成常用的Excel分析模板：</a:t>
+            </a:r>
+          </a:p>
+          <a:p>
+            <a:r>
+              <a:t/>
+            </a:r>
+          </a:p>
+          <a:p>
+            <a:r>
+              <a:t>• 趋势分析模板——输入月份和收入数据，自动计算同比环比和毛利率</a:t>
+            </a:r>
+          </a:p>
+          <a:p>
+            <a:r>
+              <a:t>• 数据匹配工具——两列数据快速匹配合并，标记差异项</a:t>
+            </a:r>
+          </a:p>
+          <a:p>
+            <a:r>
+              <a:t>• 抽样计算表——MUS货币单位抽样，自动算样本量和选样</a:t>
+            </a:r>
+          </a:p>
+          <a:p>
+            <a:r>
+              <a:t>• 异常筛选——按条件标记超出范围的数据点</a:t>
+            </a:r>
+          </a:p>
+          <a:p>
+            <a:r>
+              <a:t/>
+            </a:r>
+          </a:p>
+          <a:p>
+            <a:r>
+              <a:t>一句话：当你需要做数据分析或数据匹配时，告诉NOVA你的数据格式，</a:t>
+            </a:r>
+          </a:p>
+          <a:p>
+            <a:r>
+              <a:t>它直接生成带公式的Excel模板，你只需要填入数据、验算结果。</a:t>
+            </a:r>
+          </a:p>
+          <a:p>
+            <a:r>
+              <a:t/>
+            </a:r>
+          </a:p>
+          <a:p>
+            <a:r>
+              <a:t>注意：公式一定要验算！随机挑3行数据手工核对，确保引用范围没错。</a:t>
+            </a:r>
           </a:p>
         </p:txBody>
       </p:sp>
@@ -5770,9 +5898,69 @@
                 <a:ea typeface="Microsoft YaHei" pitchFamily="34" charset="-122"/>
                 <a:cs typeface="Microsoft YaHei" pitchFamily="34" charset="-120"/>
               </a:rPr>
-              <a:t>用NOVA自动生成分析模板，你拿到的是一个带公式、带图表的现成Excel。你只需填入数据，公式就会自动计算。</a:t>
+              <a:t>F04 Excel表格处理 — 功能概览</a:t>
             </a:r>
             <a:endParaRPr lang="en-US" sz="1500" dirty="0"/>
+          </a:p>
+          <a:p>
+            <a:r>
+              <a:t/>
+            </a:r>
+          </a:p>
+          <a:p>
+            <a:r>
+              <a:t>NOVA可以帮你快速生成常用的Excel分析模板：</a:t>
+            </a:r>
+          </a:p>
+          <a:p>
+            <a:r>
+              <a:t/>
+            </a:r>
+          </a:p>
+          <a:p>
+            <a:r>
+              <a:t>• 趋势分析模板——输入月份和收入数据，自动计算同比环比和毛利率</a:t>
+            </a:r>
+          </a:p>
+          <a:p>
+            <a:r>
+              <a:t>• 数据匹配工具——两列数据快速匹配合并，标记差异项</a:t>
+            </a:r>
+          </a:p>
+          <a:p>
+            <a:r>
+              <a:t>• 抽样计算表——MUS货币单位抽样，自动算样本量和选样</a:t>
+            </a:r>
+          </a:p>
+          <a:p>
+            <a:r>
+              <a:t>• 异常筛选——按条件标记超出范围的数据点</a:t>
+            </a:r>
+          </a:p>
+          <a:p>
+            <a:r>
+              <a:t/>
+            </a:r>
+          </a:p>
+          <a:p>
+            <a:r>
+              <a:t>一句话：当你需要做数据分析或数据匹配时，告诉NOVA你的数据格式，</a:t>
+            </a:r>
+          </a:p>
+          <a:p>
+            <a:r>
+              <a:t>它直接生成带公式的Excel模板，你只需要填入数据、验算结果。</a:t>
+            </a:r>
+          </a:p>
+          <a:p>
+            <a:r>
+              <a:t/>
+            </a:r>
+          </a:p>
+          <a:p>
+            <a:r>
+              <a:t>注意：公式一定要验算！随机挑3行数据手工核对，确保引用范围没错。</a:t>
+            </a:r>
           </a:p>
         </p:txBody>
       </p:sp>
@@ -5809,9 +5997,69 @@
                 <a:ea typeface="Microsoft YaHei" pitchFamily="34" charset="-122"/>
                 <a:cs typeface="Microsoft YaHei" pitchFamily="34" charset="-120"/>
               </a:rPr>
-              <a:t>Why解释：假设你每周做3套分析程序，每套手工做1.5小时。一年下来光是建公式就要花200+小时。用模板每次节省1小时以上，省下来的时间可以用来做更细致的质量复核，减少被Field退回的概率。</a:t>
+              <a:t>F04 Excel表格处理 — 功能概览</a:t>
             </a:r>
             <a:endParaRPr lang="en-US" sz="1300" dirty="0"/>
+          </a:p>
+          <a:p>
+            <a:r>
+              <a:t/>
+            </a:r>
+          </a:p>
+          <a:p>
+            <a:r>
+              <a:t>NOVA可以帮你快速生成常用的Excel分析模板：</a:t>
+            </a:r>
+          </a:p>
+          <a:p>
+            <a:r>
+              <a:t/>
+            </a:r>
+          </a:p>
+          <a:p>
+            <a:r>
+              <a:t>• 趋势分析模板——输入月份和收入数据，自动计算同比环比和毛利率</a:t>
+            </a:r>
+          </a:p>
+          <a:p>
+            <a:r>
+              <a:t>• 数据匹配工具——两列数据快速匹配合并，标记差异项</a:t>
+            </a:r>
+          </a:p>
+          <a:p>
+            <a:r>
+              <a:t>• 抽样计算表——MUS货币单位抽样，自动算样本量和选样</a:t>
+            </a:r>
+          </a:p>
+          <a:p>
+            <a:r>
+              <a:t>• 异常筛选——按条件标记超出范围的数据点</a:t>
+            </a:r>
+          </a:p>
+          <a:p>
+            <a:r>
+              <a:t/>
+            </a:r>
+          </a:p>
+          <a:p>
+            <a:r>
+              <a:t>一句话：当你需要做数据分析或数据匹配时，告诉NOVA你的数据格式，</a:t>
+            </a:r>
+          </a:p>
+          <a:p>
+            <a:r>
+              <a:t>它直接生成带公式的Excel模板，你只需要填入数据、验算结果。</a:t>
+            </a:r>
+          </a:p>
+          <a:p>
+            <a:r>
+              <a:t/>
+            </a:r>
+          </a:p>
+          <a:p>
+            <a:r>
+              <a:t>注意：公式一定要验算！随机挑3行数据手工核对，确保引用范围没错。</a:t>
+            </a:r>
           </a:p>
         </p:txBody>
       </p:sp>
@@ -5834,6 +6082,10 @@
           </a:solidFill>
           <a:ln/>
         </p:spPr>
+        <p:txBody>
+          <a:bodyPr/>
+          <a:p/>
+        </p:txBody>
       </p:sp>
       <p:sp>
         <p:nvSpPr>
@@ -5883,7 +6135,7 @@
 </file>
 
 <file path=ppt/slides/slide11.xml><?xml version="1.0" encoding="utf-8"?>
-<p:sld xmlns:a="http://schemas.openxmlformats.org/drawingml/2006/main" xmlns:r="http://schemas.openxmlformats.org/officeDocument/2006/relationships" xmlns:p="http://schemas.openxmlformats.org/presentationml/2006/main">
+<p:sld xmlns:a="http://schemas.openxmlformats.org/drawingml/2006/main" xmlns:r="http://schemas.openxmlformats.org/officeDocument/2006/relationships" xmlns:p="http://schemas.openxmlformats.org/presentationml/2006/main" show="0">
   <p:cSld name="Slide 11">
     <p:bg>
       <p:bgPr>
@@ -5925,6 +6177,10 @@
           </a:solidFill>
           <a:ln/>
         </p:spPr>
+        <p:txBody>
+          <a:bodyPr/>
+          <a:p/>
+        </p:txBody>
       </p:sp>
       <p:sp>
         <p:nvSpPr>
@@ -6030,6 +6286,10 @@
             <a:prstDash val="solid"/>
           </a:ln>
         </p:spPr>
+        <p:txBody>
+          <a:bodyPr/>
+          <a:p/>
+        </p:txBody>
       </p:sp>
       <p:sp>
         <p:nvSpPr>
@@ -6135,6 +6395,10 @@
             <a:prstDash val="solid"/>
           </a:ln>
         </p:spPr>
+        <p:txBody>
+          <a:bodyPr/>
+          <a:p/>
+        </p:txBody>
       </p:sp>
       <p:sp>
         <p:nvSpPr>
@@ -6240,6 +6504,10 @@
             <a:prstDash val="solid"/>
           </a:ln>
         </p:spPr>
+        <p:txBody>
+          <a:bodyPr/>
+          <a:p/>
+        </p:txBody>
       </p:sp>
       <p:sp>
         <p:nvSpPr>
@@ -6338,6 +6606,10 @@
           </a:solidFill>
           <a:ln/>
         </p:spPr>
+        <p:txBody>
+          <a:bodyPr/>
+          <a:p/>
+        </p:txBody>
       </p:sp>
       <p:sp>
         <p:nvSpPr>
@@ -6387,7 +6659,7 @@
 </file>
 
 <file path=ppt/slides/slide12.xml><?xml version="1.0" encoding="utf-8"?>
-<p:sld xmlns:a="http://schemas.openxmlformats.org/drawingml/2006/main" xmlns:r="http://schemas.openxmlformats.org/officeDocument/2006/relationships" xmlns:p="http://schemas.openxmlformats.org/presentationml/2006/main">
+<p:sld xmlns:a="http://schemas.openxmlformats.org/drawingml/2006/main" xmlns:r="http://schemas.openxmlformats.org/officeDocument/2006/relationships" xmlns:p="http://schemas.openxmlformats.org/presentationml/2006/main" show="0">
   <p:cSld name="Slide 12">
     <p:bg>
       <p:bgPr>
@@ -6429,6 +6701,10 @@
           </a:solidFill>
           <a:ln/>
         </p:spPr>
+        <p:txBody>
+          <a:bodyPr/>
+          <a:p/>
+        </p:txBody>
       </p:sp>
       <p:sp>
         <p:nvSpPr>
@@ -6566,6 +6842,10 @@
           </a:solidFill>
           <a:ln/>
         </p:spPr>
+        <p:txBody>
+          <a:bodyPr/>
+          <a:p/>
+        </p:txBody>
       </p:sp>
       <p:sp>
         <p:nvSpPr>
@@ -6703,6 +6983,10 @@
           </a:solidFill>
           <a:ln/>
         </p:spPr>
+        <p:txBody>
+          <a:bodyPr/>
+          <a:p/>
+        </p:txBody>
       </p:sp>
       <p:sp>
         <p:nvSpPr>
@@ -6879,6 +7163,10 @@
           </a:solidFill>
           <a:ln/>
         </p:spPr>
+        <p:txBody>
+          <a:bodyPr/>
+          <a:p/>
+        </p:txBody>
       </p:sp>
       <p:sp>
         <p:nvSpPr>
@@ -6928,7 +7216,7 @@
 </file>
 
 <file path=ppt/slides/slide13.xml><?xml version="1.0" encoding="utf-8"?>
-<p:sld xmlns:a="http://schemas.openxmlformats.org/drawingml/2006/main" xmlns:r="http://schemas.openxmlformats.org/officeDocument/2006/relationships" xmlns:p="http://schemas.openxmlformats.org/presentationml/2006/main">
+<p:sld xmlns:a="http://schemas.openxmlformats.org/drawingml/2006/main" xmlns:r="http://schemas.openxmlformats.org/officeDocument/2006/relationships" xmlns:p="http://schemas.openxmlformats.org/presentationml/2006/main" show="0">
   <p:cSld name="Slide 13">
     <p:bg>
       <p:bgPr>
@@ -6970,6 +7258,10 @@
           </a:solidFill>
           <a:ln/>
         </p:spPr>
+        <p:txBody>
+          <a:bodyPr/>
+          <a:p/>
+        </p:txBody>
       </p:sp>
       <p:sp>
         <p:nvSpPr>
@@ -7075,6 +7367,10 @@
             <a:prstDash val="solid"/>
           </a:ln>
         </p:spPr>
+        <p:txBody>
+          <a:bodyPr/>
+          <a:p/>
+        </p:txBody>
       </p:sp>
       <p:sp>
         <p:nvSpPr>
@@ -7214,6 +7510,10 @@
             <a:prstDash val="solid"/>
           </a:ln>
         </p:spPr>
+        <p:txBody>
+          <a:bodyPr/>
+          <a:p/>
+        </p:txBody>
       </p:sp>
       <p:sp>
         <p:nvSpPr>
@@ -7363,6 +7663,10 @@
           </a:solidFill>
           <a:ln/>
         </p:spPr>
+        <p:txBody>
+          <a:bodyPr/>
+          <a:p/>
+        </p:txBody>
       </p:sp>
       <p:sp>
         <p:nvSpPr>
@@ -7412,7 +7716,7 @@
 </file>
 
 <file path=ppt/slides/slide14.xml><?xml version="1.0" encoding="utf-8"?>
-<p:sld xmlns:a="http://schemas.openxmlformats.org/drawingml/2006/main" xmlns:r="http://schemas.openxmlformats.org/officeDocument/2006/relationships" xmlns:p="http://schemas.openxmlformats.org/presentationml/2006/main">
+<p:sld xmlns:a="http://schemas.openxmlformats.org/drawingml/2006/main" xmlns:r="http://schemas.openxmlformats.org/officeDocument/2006/relationships" xmlns:p="http://schemas.openxmlformats.org/presentationml/2006/main" show="0">
   <p:cSld name="Slide 14">
     <p:bg>
       <p:bgPr>
@@ -7454,6 +7758,10 @@
           </a:solidFill>
           <a:ln/>
         </p:spPr>
+        <p:txBody>
+          <a:bodyPr/>
+          <a:p/>
+        </p:txBody>
       </p:sp>
       <p:sp>
         <p:nvSpPr>
@@ -7559,6 +7867,10 @@
             <a:prstDash val="solid"/>
           </a:ln>
         </p:spPr>
+        <p:txBody>
+          <a:bodyPr/>
+          <a:p/>
+        </p:txBody>
       </p:sp>
       <p:sp>
         <p:nvSpPr>
@@ -7742,6 +8054,10 @@
             <a:prstDash val="solid"/>
           </a:ln>
         </p:spPr>
+        <p:txBody>
+          <a:bodyPr/>
+          <a:p/>
+        </p:txBody>
       </p:sp>
       <p:sp>
         <p:nvSpPr>
@@ -7776,7 +8092,7 @@
                 <a:ea typeface="Microsoft YaHei" pitchFamily="34" charset="-122"/>
                 <a:cs typeface="Microsoft YaHei" pitchFamily="34" charset="-120"/>
               </a:rPr>
-              <a:t>现场互动</a:t>
+              <a:t>课后练习</a:t>
             </a:r>
             <a:endParaRPr lang="en-US" sz="1400" dirty="0"/>
           </a:p>
@@ -7840,6 +8156,10 @@
           </a:solidFill>
           <a:ln/>
         </p:spPr>
+        <p:txBody>
+          <a:bodyPr/>
+          <a:p/>
+        </p:txBody>
       </p:sp>
       <p:sp>
         <p:nvSpPr>
@@ -7931,6 +8251,10 @@
           </a:solidFill>
           <a:ln/>
         </p:spPr>
+        <p:txBody>
+          <a:bodyPr/>
+          <a:p/>
+        </p:txBody>
       </p:sp>
       <p:sp>
         <p:nvSpPr>
@@ -8068,6 +8392,10 @@
           </a:solidFill>
           <a:ln/>
         </p:spPr>
+        <p:txBody>
+          <a:bodyPr/>
+          <a:p/>
+        </p:txBody>
       </p:sp>
       <p:sp>
         <p:nvSpPr>
@@ -8159,6 +8487,10 @@
           </a:solidFill>
           <a:ln/>
         </p:spPr>
+        <p:txBody>
+          <a:bodyPr/>
+          <a:p/>
+        </p:txBody>
       </p:sp>
       <p:sp>
         <p:nvSpPr>
@@ -8452,6 +8784,10 @@
           </a:solidFill>
           <a:ln/>
         </p:spPr>
+        <p:txBody>
+          <a:bodyPr/>
+          <a:p/>
+        </p:txBody>
       </p:sp>
       <p:sp>
         <p:nvSpPr>
@@ -8543,6 +8879,10 @@
           </a:solidFill>
           <a:ln/>
         </p:spPr>
+        <p:txBody>
+          <a:bodyPr/>
+          <a:p/>
+        </p:txBody>
       </p:sp>
       <p:sp>
         <p:nvSpPr>
@@ -8648,6 +8988,10 @@
             <a:prstDash val="solid"/>
           </a:ln>
         </p:spPr>
+        <p:txBody>
+          <a:bodyPr/>
+          <a:p/>
+        </p:txBody>
       </p:sp>
       <p:sp>
         <p:nvSpPr>
@@ -8753,6 +9097,10 @@
             <a:prstDash val="solid"/>
           </a:ln>
         </p:spPr>
+        <p:txBody>
+          <a:bodyPr/>
+          <a:p/>
+        </p:txBody>
       </p:sp>
       <p:sp>
         <p:nvSpPr>
@@ -8858,6 +9206,10 @@
             <a:prstDash val="solid"/>
           </a:ln>
         </p:spPr>
+        <p:txBody>
+          <a:bodyPr/>
+          <a:p/>
+        </p:txBody>
       </p:sp>
       <p:sp>
         <p:nvSpPr>
@@ -8956,6 +9308,10 @@
           </a:solidFill>
           <a:ln/>
         </p:spPr>
+        <p:txBody>
+          <a:bodyPr/>
+          <a:p/>
+        </p:txBody>
       </p:sp>
       <p:sp>
         <p:nvSpPr>
@@ -9047,6 +9403,10 @@
           </a:solidFill>
           <a:ln/>
         </p:spPr>
+        <p:txBody>
+          <a:bodyPr/>
+          <a:p/>
+        </p:txBody>
       </p:sp>
       <p:sp>
         <p:nvSpPr>
@@ -9184,6 +9544,10 @@
           </a:solidFill>
           <a:ln/>
         </p:spPr>
+        <p:txBody>
+          <a:bodyPr/>
+          <a:p/>
+        </p:txBody>
       </p:sp>
       <p:sp>
         <p:nvSpPr>
@@ -9321,6 +9685,10 @@
           </a:solidFill>
           <a:ln/>
         </p:spPr>
+        <p:txBody>
+          <a:bodyPr/>
+          <a:p/>
+        </p:txBody>
       </p:sp>
       <p:sp>
         <p:nvSpPr>
@@ -9497,6 +9865,10 @@
           </a:solidFill>
           <a:ln/>
         </p:spPr>
+        <p:txBody>
+          <a:bodyPr/>
+          <a:p/>
+        </p:txBody>
       </p:sp>
       <p:sp>
         <p:nvSpPr>
@@ -9588,6 +9960,10 @@
           </a:solidFill>
           <a:ln/>
         </p:spPr>
+        <p:txBody>
+          <a:bodyPr/>
+          <a:p/>
+        </p:txBody>
       </p:sp>
       <p:sp>
         <p:nvSpPr>
@@ -9693,6 +10069,10 @@
             <a:prstDash val="solid"/>
           </a:ln>
         </p:spPr>
+        <p:txBody>
+          <a:bodyPr/>
+          <a:p/>
+        </p:txBody>
       </p:sp>
       <p:sp>
         <p:nvSpPr>
@@ -9849,6 +10229,10 @@
             <a:prstDash val="solid"/>
           </a:ln>
         </p:spPr>
+        <p:txBody>
+          <a:bodyPr/>
+          <a:p/>
+        </p:txBody>
       </p:sp>
       <p:sp>
         <p:nvSpPr>
@@ -10032,6 +10416,10 @@
           </a:solidFill>
           <a:ln/>
         </p:spPr>
+        <p:txBody>
+          <a:bodyPr/>
+          <a:p/>
+        </p:txBody>
       </p:sp>
       <p:sp>
         <p:nvSpPr>
@@ -10162,6 +10550,10 @@
           </a:solidFill>
           <a:ln/>
         </p:spPr>
+        <p:txBody>
+          <a:bodyPr/>
+          <a:p/>
+        </p:txBody>
       </p:sp>
       <p:sp>
         <p:nvSpPr>
@@ -10221,6 +10613,10 @@
           </a:solidFill>
           <a:ln/>
         </p:spPr>
+        <p:txBody>
+          <a:bodyPr/>
+          <a:p/>
+        </p:txBody>
       </p:sp>
       <p:sp>
         <p:nvSpPr>
@@ -10255,7 +10651,7 @@
                 <a:ea typeface="Microsoft YaHei" pitchFamily="34" charset="-122"/>
                 <a:cs typeface="Microsoft YaHei" pitchFamily="34" charset="-120"/>
               </a:rPr>
-              <a:t>F04  Excel表格处理 — 审计分析程序与数据建模自动化</a:t>
+              <a:t>其他功能：F04 Excel表格处理 | F09 财务报表查询（详见后文概览）</a:t>
             </a:r>
             <a:endParaRPr lang="en-US" sz="1400" dirty="0"/>
           </a:p>
@@ -10280,6 +10676,10 @@
           </a:solidFill>
           <a:ln/>
         </p:spPr>
+        <p:txBody>
+          <a:bodyPr/>
+          <a:p/>
+        </p:txBody>
       </p:sp>
       <p:sp>
         <p:nvSpPr>
@@ -10339,6 +10739,10 @@
           </a:solidFill>
           <a:ln/>
         </p:spPr>
+        <p:txBody>
+          <a:bodyPr/>
+          <a:p/>
+        </p:txBody>
       </p:sp>
       <p:sp>
         <p:nvSpPr>
@@ -10373,7 +10777,7 @@
                 <a:ea typeface="Microsoft YaHei" pitchFamily="34" charset="-122"/>
                 <a:cs typeface="Microsoft YaHei" pitchFamily="34" charset="-120"/>
               </a:rPr>
-              <a:t>F09  财务报表API — A股/港股上市公司财务数据批量获取</a:t>
+              <a:t/>
             </a:r>
             <a:endParaRPr lang="en-US" sz="1400" dirty="0"/>
           </a:p>
@@ -10398,6 +10802,10 @@
           </a:solidFill>
           <a:ln/>
         </p:spPr>
+        <p:txBody>
+          <a:bodyPr/>
+          <a:p/>
+        </p:txBody>
       </p:sp>
       <p:sp>
         <p:nvSpPr>
@@ -10457,6 +10865,10 @@
           </a:solidFill>
           <a:ln/>
         </p:spPr>
+        <p:txBody>
+          <a:bodyPr/>
+          <a:p/>
+        </p:txBody>
       </p:sp>
       <p:sp>
         <p:nvSpPr>
@@ -10516,6 +10928,10 @@
           </a:solidFill>
           <a:ln/>
         </p:spPr>
+        <p:txBody>
+          <a:bodyPr/>
+          <a:p/>
+        </p:txBody>
       </p:sp>
       <p:sp>
         <p:nvSpPr>
@@ -10575,6 +10991,10 @@
           </a:solidFill>
           <a:ln/>
         </p:spPr>
+        <p:txBody>
+          <a:bodyPr/>
+          <a:p/>
+        </p:txBody>
       </p:sp>
       <p:sp>
         <p:nvSpPr>
@@ -10634,6 +11054,10 @@
           </a:solidFill>
           <a:ln/>
         </p:spPr>
+        <p:txBody>
+          <a:bodyPr/>
+          <a:p/>
+        </p:txBody>
       </p:sp>
       <p:sp>
         <p:nvSpPr>
@@ -10725,6 +11149,10 @@
           </a:solidFill>
           <a:ln/>
         </p:spPr>
+        <p:txBody>
+          <a:bodyPr/>
+          <a:p/>
+        </p:txBody>
       </p:sp>
       <p:sp>
         <p:nvSpPr>
@@ -10830,6 +11258,10 @@
             <a:prstDash val="solid"/>
           </a:ln>
         </p:spPr>
+        <p:txBody>
+          <a:bodyPr/>
+          <a:p/>
+        </p:txBody>
       </p:sp>
       <p:sp>
         <p:nvSpPr>
@@ -11013,6 +11445,10 @@
             <a:prstDash val="solid"/>
           </a:ln>
         </p:spPr>
+        <p:txBody>
+          <a:bodyPr/>
+          <a:p/>
+        </p:txBody>
       </p:sp>
       <p:sp>
         <p:nvSpPr>
@@ -11047,7 +11483,7 @@
                 <a:ea typeface="Microsoft YaHei" pitchFamily="34" charset="-122"/>
                 <a:cs typeface="Microsoft YaHei" pitchFamily="34" charset="-120"/>
               </a:rPr>
-              <a:t>现场互动</a:t>
+              <a:t>课后练习</a:t>
             </a:r>
             <a:endParaRPr lang="en-US" sz="1400" dirty="0"/>
           </a:p>
@@ -11111,6 +11547,10 @@
           </a:solidFill>
           <a:ln/>
         </p:spPr>
+        <p:txBody>
+          <a:bodyPr/>
+          <a:p/>
+        </p:txBody>
       </p:sp>
       <p:sp>
         <p:nvSpPr>
@@ -11202,6 +11642,10 @@
           </a:solidFill>
           <a:ln/>
         </p:spPr>
+        <p:txBody>
+          <a:bodyPr/>
+          <a:p/>
+        </p:txBody>
       </p:sp>
       <p:sp>
         <p:nvSpPr>
@@ -11314,7 +11758,7 @@
                 <a:ea typeface="Microsoft YaHei" pitchFamily="34" charset="-122"/>
                 <a:cs typeface="Microsoft YaHei" pitchFamily="34" charset="-120"/>
               </a:rPr>
-              <a:t>A股/港股上市公司财务数据批量获取</a:t>
+              <a:t>快速查询上市公司财务数据</a:t>
             </a:r>
             <a:endParaRPr lang="en-US" sz="1600" dirty="0"/>
           </a:p>
@@ -11339,6 +11783,10 @@
           </a:solidFill>
           <a:ln/>
         </p:spPr>
+        <p:txBody>
+          <a:bodyPr/>
+          <a:p/>
+        </p:txBody>
       </p:sp>
       <p:sp>
         <p:nvSpPr>
@@ -11430,6 +11878,10 @@
           </a:solidFill>
           <a:ln/>
         </p:spPr>
+        <p:txBody>
+          <a:bodyPr/>
+          <a:p/>
+        </p:txBody>
       </p:sp>
       <p:sp>
         <p:nvSpPr>
@@ -11581,9 +12033,74 @@
                 <a:ea typeface="Microsoft YaHei" pitchFamily="34" charset="-122"/>
                 <a:cs typeface="Microsoft YaHei" pitchFamily="34" charset="-120"/>
               </a:rPr>
-              <a:t>比如客户毛利率是35%，你不确定这个数字正常不正常。如果要和同行比，你需要找3-5家可比公司，从巨潮资讯或交易所网站下载它们的年报，然后再整理成Excel。</a:t>
+              <a:t>F09 财务报表查询 — 功能概览</a:t>
             </a:r>
             <a:endParaRPr lang="en-US" sz="1500" dirty="0"/>
+          </a:p>
+          <a:p>
+            <a:r>
+              <a:t/>
+            </a:r>
+          </a:p>
+          <a:p>
+            <a:r>
+              <a:t>NOVA可以快速获取上市公司公开财务数据：</a:t>
+            </a:r>
+          </a:p>
+          <a:p>
+            <a:r>
+              <a:t/>
+            </a:r>
+          </a:p>
+          <a:p>
+            <a:r>
+              <a:t>• 查询A股/港股上市公司核心财务指标</a:t>
+            </a:r>
+          </a:p>
+          <a:p>
+            <a:r>
+              <a:t>• 支持按股票代码或公司名称搜索</a:t>
+            </a:r>
+          </a:p>
+          <a:p>
+            <a:r>
+              <a:t>• 数据导出为标准化Excel格式</a:t>
+            </a:r>
+          </a:p>
+          <a:p>
+            <a:r>
+              <a:t>• 可用于行业对比和趋势分析</a:t>
+            </a:r>
+          </a:p>
+          <a:p>
+            <a:r>
+              <a:t/>
+            </a:r>
+          </a:p>
+          <a:p>
+            <a:r>
+              <a:t>一句话：需要找同行数据做比较分析时，直接输股票代码导出数据，</a:t>
+            </a:r>
+          </a:p>
+          <a:p>
+            <a:r>
+              <a:t>省去手动从年报PDF里抄数字的时间和出错风险。</a:t>
+            </a:r>
+          </a:p>
+          <a:p>
+            <a:r>
+              <a:t/>
+            </a:r>
+          </a:p>
+          <a:p>
+            <a:r>
+              <a:t>注意：导出后务必抽查1-2个年度，核对营收、净利润等关键数字</a:t>
+            </a:r>
+          </a:p>
+          <a:p>
+            <a:r>
+              <a:t>与公司已披露年报是否一致，确认单位（元/万元）是否正确。</a:t>
+            </a:r>
           </a:p>
         </p:txBody>
       </p:sp>
@@ -11659,9 +12176,74 @@
                 <a:ea typeface="Microsoft YaHei" pitchFamily="34" charset="-122"/>
                 <a:cs typeface="Microsoft YaHei" pitchFamily="34" charset="-120"/>
               </a:rPr>
-              <a:t>API功能直连数据库，你只需要输入公司名称或股票代码，点一下导出，几分钟就能拿到标准化的Excel表格。</a:t>
+              <a:t>F09 财务报表查询 — 功能概览</a:t>
             </a:r>
             <a:endParaRPr lang="en-US" sz="1500" dirty="0"/>
+          </a:p>
+          <a:p>
+            <a:r>
+              <a:t/>
+            </a:r>
+          </a:p>
+          <a:p>
+            <a:r>
+              <a:t>NOVA可以快速获取上市公司公开财务数据：</a:t>
+            </a:r>
+          </a:p>
+          <a:p>
+            <a:r>
+              <a:t/>
+            </a:r>
+          </a:p>
+          <a:p>
+            <a:r>
+              <a:t>• 查询A股/港股上市公司核心财务指标</a:t>
+            </a:r>
+          </a:p>
+          <a:p>
+            <a:r>
+              <a:t>• 支持按股票代码或公司名称搜索</a:t>
+            </a:r>
+          </a:p>
+          <a:p>
+            <a:r>
+              <a:t>• 数据导出为标准化Excel格式</a:t>
+            </a:r>
+          </a:p>
+          <a:p>
+            <a:r>
+              <a:t>• 可用于行业对比和趋势分析</a:t>
+            </a:r>
+          </a:p>
+          <a:p>
+            <a:r>
+              <a:t/>
+            </a:r>
+          </a:p>
+          <a:p>
+            <a:r>
+              <a:t>一句话：需要找同行数据做比较分析时，直接输股票代码导出数据，</a:t>
+            </a:r>
+          </a:p>
+          <a:p>
+            <a:r>
+              <a:t>省去手动从年报PDF里抄数字的时间和出错风险。</a:t>
+            </a:r>
+          </a:p>
+          <a:p>
+            <a:r>
+              <a:t/>
+            </a:r>
+          </a:p>
+          <a:p>
+            <a:r>
+              <a:t>注意：导出后务必抽查1-2个年度，核对营收、净利润等关键数字</a:t>
+            </a:r>
+          </a:p>
+          <a:p>
+            <a:r>
+              <a:t>与公司已披露年报是否一致，确认单位（元/万元）是否正确。</a:t>
+            </a:r>
           </a:p>
         </p:txBody>
       </p:sp>
@@ -11698,9 +12280,74 @@
                 <a:ea typeface="Microsoft YaHei" pitchFamily="34" charset="-122"/>
                 <a:cs typeface="Microsoft YaHei" pitchFamily="34" charset="-120"/>
               </a:rPr>
-              <a:t>Why解释：Field团队给你的时间窗口通常很短。手工整理数据用半天，真正做分析的时间只剩2小时，很容易匆忙出错。API帮你把数据准备工作压缩到15分钟，让你有更多时间做质量复核。</a:t>
+              <a:t>F09 财务报表查询 — 功能概览</a:t>
             </a:r>
             <a:endParaRPr lang="en-US" sz="1300" dirty="0"/>
+          </a:p>
+          <a:p>
+            <a:r>
+              <a:t/>
+            </a:r>
+          </a:p>
+          <a:p>
+            <a:r>
+              <a:t>NOVA可以快速获取上市公司公开财务数据：</a:t>
+            </a:r>
+          </a:p>
+          <a:p>
+            <a:r>
+              <a:t/>
+            </a:r>
+          </a:p>
+          <a:p>
+            <a:r>
+              <a:t>• 查询A股/港股上市公司核心财务指标</a:t>
+            </a:r>
+          </a:p>
+          <a:p>
+            <a:r>
+              <a:t>• 支持按股票代码或公司名称搜索</a:t>
+            </a:r>
+          </a:p>
+          <a:p>
+            <a:r>
+              <a:t>• 数据导出为标准化Excel格式</a:t>
+            </a:r>
+          </a:p>
+          <a:p>
+            <a:r>
+              <a:t>• 可用于行业对比和趋势分析</a:t>
+            </a:r>
+          </a:p>
+          <a:p>
+            <a:r>
+              <a:t/>
+            </a:r>
+          </a:p>
+          <a:p>
+            <a:r>
+              <a:t>一句话：需要找同行数据做比较分析时，直接输股票代码导出数据，</a:t>
+            </a:r>
+          </a:p>
+          <a:p>
+            <a:r>
+              <a:t>省去手动从年报PDF里抄数字的时间和出错风险。</a:t>
+            </a:r>
+          </a:p>
+          <a:p>
+            <a:r>
+              <a:t/>
+            </a:r>
+          </a:p>
+          <a:p>
+            <a:r>
+              <a:t>注意：导出后务必抽查1-2个年度，核对营收、净利润等关键数字</a:t>
+            </a:r>
+          </a:p>
+          <a:p>
+            <a:r>
+              <a:t>与公司已披露年报是否一致，确认单位（元/万元）是否正确。</a:t>
+            </a:r>
           </a:p>
         </p:txBody>
       </p:sp>
@@ -11723,6 +12370,10 @@
           </a:solidFill>
           <a:ln/>
         </p:spPr>
+        <p:txBody>
+          <a:bodyPr/>
+          <a:p/>
+        </p:txBody>
       </p:sp>
       <p:sp>
         <p:nvSpPr>
@@ -11772,7 +12423,7 @@
 </file>
 
 <file path=ppt/slides/slide23.xml><?xml version="1.0" encoding="utf-8"?>
-<p:sld xmlns:a="http://schemas.openxmlformats.org/drawingml/2006/main" xmlns:r="http://schemas.openxmlformats.org/officeDocument/2006/relationships" xmlns:p="http://schemas.openxmlformats.org/presentationml/2006/main">
+<p:sld xmlns:a="http://schemas.openxmlformats.org/drawingml/2006/main" xmlns:r="http://schemas.openxmlformats.org/officeDocument/2006/relationships" xmlns:p="http://schemas.openxmlformats.org/presentationml/2006/main" show="0">
   <p:cSld name="Slide 23">
     <p:bg>
       <p:bgPr>
@@ -11814,6 +12465,10 @@
           </a:solidFill>
           <a:ln/>
         </p:spPr>
+        <p:txBody>
+          <a:bodyPr/>
+          <a:p/>
+        </p:txBody>
       </p:sp>
       <p:sp>
         <p:nvSpPr>
@@ -11919,6 +12574,10 @@
             <a:prstDash val="solid"/>
           </a:ln>
         </p:spPr>
+        <p:txBody>
+          <a:bodyPr/>
+          <a:p/>
+        </p:txBody>
       </p:sp>
       <p:sp>
         <p:nvSpPr>
@@ -12024,6 +12683,10 @@
             <a:prstDash val="solid"/>
           </a:ln>
         </p:spPr>
+        <p:txBody>
+          <a:bodyPr/>
+          <a:p/>
+        </p:txBody>
       </p:sp>
       <p:sp>
         <p:nvSpPr>
@@ -12129,6 +12792,10 @@
             <a:prstDash val="solid"/>
           </a:ln>
         </p:spPr>
+        <p:txBody>
+          <a:bodyPr/>
+          <a:p/>
+        </p:txBody>
       </p:sp>
       <p:sp>
         <p:nvSpPr>
@@ -12227,6 +12894,10 @@
           </a:solidFill>
           <a:ln/>
         </p:spPr>
+        <p:txBody>
+          <a:bodyPr/>
+          <a:p/>
+        </p:txBody>
       </p:sp>
       <p:sp>
         <p:nvSpPr>
@@ -12276,7 +12947,7 @@
 </file>
 
 <file path=ppt/slides/slide24.xml><?xml version="1.0" encoding="utf-8"?>
-<p:sld xmlns:a="http://schemas.openxmlformats.org/drawingml/2006/main" xmlns:r="http://schemas.openxmlformats.org/officeDocument/2006/relationships" xmlns:p="http://schemas.openxmlformats.org/presentationml/2006/main">
+<p:sld xmlns:a="http://schemas.openxmlformats.org/drawingml/2006/main" xmlns:r="http://schemas.openxmlformats.org/officeDocument/2006/relationships" xmlns:p="http://schemas.openxmlformats.org/presentationml/2006/main" show="0">
   <p:cSld name="Slide 24">
     <p:bg>
       <p:bgPr>
@@ -12318,6 +12989,10 @@
           </a:solidFill>
           <a:ln/>
         </p:spPr>
+        <p:txBody>
+          <a:bodyPr/>
+          <a:p/>
+        </p:txBody>
       </p:sp>
       <p:sp>
         <p:nvSpPr>
@@ -12455,6 +13130,10 @@
           </a:solidFill>
           <a:ln/>
         </p:spPr>
+        <p:txBody>
+          <a:bodyPr/>
+          <a:p/>
+        </p:txBody>
       </p:sp>
       <p:sp>
         <p:nvSpPr>
@@ -12592,6 +13271,10 @@
           </a:solidFill>
           <a:ln/>
         </p:spPr>
+        <p:txBody>
+          <a:bodyPr/>
+          <a:p/>
+        </p:txBody>
       </p:sp>
       <p:sp>
         <p:nvSpPr>
@@ -12768,6 +13451,10 @@
           </a:solidFill>
           <a:ln/>
         </p:spPr>
+        <p:txBody>
+          <a:bodyPr/>
+          <a:p/>
+        </p:txBody>
       </p:sp>
       <p:sp>
         <p:nvSpPr>
@@ -12817,7 +13504,7 @@
 </file>
 
 <file path=ppt/slides/slide25.xml><?xml version="1.0" encoding="utf-8"?>
-<p:sld xmlns:a="http://schemas.openxmlformats.org/drawingml/2006/main" xmlns:r="http://schemas.openxmlformats.org/officeDocument/2006/relationships" xmlns:p="http://schemas.openxmlformats.org/presentationml/2006/main">
+<p:sld xmlns:a="http://schemas.openxmlformats.org/drawingml/2006/main" xmlns:r="http://schemas.openxmlformats.org/officeDocument/2006/relationships" xmlns:p="http://schemas.openxmlformats.org/presentationml/2006/main" show="0">
   <p:cSld name="Slide 25">
     <p:bg>
       <p:bgPr>
@@ -12859,6 +13546,10 @@
           </a:solidFill>
           <a:ln/>
         </p:spPr>
+        <p:txBody>
+          <a:bodyPr/>
+          <a:p/>
+        </p:txBody>
       </p:sp>
       <p:sp>
         <p:nvSpPr>
@@ -12964,6 +13655,10 @@
             <a:prstDash val="solid"/>
           </a:ln>
         </p:spPr>
+        <p:txBody>
+          <a:bodyPr/>
+          <a:p/>
+        </p:txBody>
       </p:sp>
       <p:sp>
         <p:nvSpPr>
@@ -13137,6 +13832,10 @@
             <a:prstDash val="solid"/>
           </a:ln>
         </p:spPr>
+        <p:txBody>
+          <a:bodyPr/>
+          <a:p/>
+        </p:txBody>
       </p:sp>
       <p:sp>
         <p:nvSpPr>
@@ -13286,6 +13985,10 @@
           </a:solidFill>
           <a:ln/>
         </p:spPr>
+        <p:txBody>
+          <a:bodyPr/>
+          <a:p/>
+        </p:txBody>
       </p:sp>
       <p:sp>
         <p:nvSpPr>
@@ -13335,7 +14038,7 @@
 </file>
 
 <file path=ppt/slides/slide26.xml><?xml version="1.0" encoding="utf-8"?>
-<p:sld xmlns:a="http://schemas.openxmlformats.org/drawingml/2006/main" xmlns:r="http://schemas.openxmlformats.org/officeDocument/2006/relationships" xmlns:p="http://schemas.openxmlformats.org/presentationml/2006/main">
+<p:sld xmlns:a="http://schemas.openxmlformats.org/drawingml/2006/main" xmlns:r="http://schemas.openxmlformats.org/officeDocument/2006/relationships" xmlns:p="http://schemas.openxmlformats.org/presentationml/2006/main" show="0">
   <p:cSld name="Slide 26">
     <p:bg>
       <p:bgPr>
@@ -13377,6 +14080,10 @@
           </a:solidFill>
           <a:ln/>
         </p:spPr>
+        <p:txBody>
+          <a:bodyPr/>
+          <a:p/>
+        </p:txBody>
       </p:sp>
       <p:sp>
         <p:nvSpPr>
@@ -13482,6 +14189,10 @@
             <a:prstDash val="solid"/>
           </a:ln>
         </p:spPr>
+        <p:txBody>
+          <a:bodyPr/>
+          <a:p/>
+        </p:txBody>
       </p:sp>
       <p:sp>
         <p:nvSpPr>
@@ -13665,6 +14376,10 @@
             <a:prstDash val="solid"/>
           </a:ln>
         </p:spPr>
+        <p:txBody>
+          <a:bodyPr/>
+          <a:p/>
+        </p:txBody>
       </p:sp>
       <p:sp>
         <p:nvSpPr>
@@ -13699,7 +14414,7 @@
                 <a:ea typeface="Microsoft YaHei" pitchFamily="34" charset="-122"/>
                 <a:cs typeface="Microsoft YaHei" pitchFamily="34" charset="-120"/>
               </a:rPr>
-              <a:t>现场互动</a:t>
+              <a:t>课后练习</a:t>
             </a:r>
             <a:endParaRPr lang="en-US" sz="1400" dirty="0"/>
           </a:p>
@@ -13763,6 +14478,10 @@
           </a:solidFill>
           <a:ln/>
         </p:spPr>
+        <p:txBody>
+          <a:bodyPr/>
+          <a:p/>
+        </p:txBody>
       </p:sp>
       <p:sp>
         <p:nvSpPr>
@@ -13854,6 +14573,10 @@
           </a:solidFill>
           <a:ln/>
         </p:spPr>
+        <p:txBody>
+          <a:bodyPr/>
+          <a:p/>
+        </p:txBody>
       </p:sp>
       <p:sp>
         <p:nvSpPr>
@@ -13991,6 +14714,10 @@
           </a:solidFill>
           <a:ln/>
         </p:spPr>
+        <p:txBody>
+          <a:bodyPr/>
+          <a:p/>
+        </p:txBody>
       </p:sp>
       <p:sp>
         <p:nvSpPr>
@@ -14082,6 +14809,10 @@
           </a:solidFill>
           <a:ln/>
         </p:spPr>
+        <p:txBody>
+          <a:bodyPr/>
+          <a:p/>
+        </p:txBody>
       </p:sp>
       <p:sp>
         <p:nvSpPr>
@@ -14375,6 +15106,10 @@
           </a:solidFill>
           <a:ln/>
         </p:spPr>
+        <p:txBody>
+          <a:bodyPr/>
+          <a:p/>
+        </p:txBody>
       </p:sp>
       <p:sp>
         <p:nvSpPr>
@@ -14466,6 +15201,10 @@
           </a:solidFill>
           <a:ln/>
         </p:spPr>
+        <p:txBody>
+          <a:bodyPr/>
+          <a:p/>
+        </p:txBody>
       </p:sp>
       <p:sp>
         <p:nvSpPr>
@@ -14571,6 +15310,10 @@
             <a:prstDash val="solid"/>
           </a:ln>
         </p:spPr>
+        <p:txBody>
+          <a:bodyPr/>
+          <a:p/>
+        </p:txBody>
       </p:sp>
       <p:sp>
         <p:nvSpPr>
@@ -14676,6 +15419,10 @@
             <a:prstDash val="solid"/>
           </a:ln>
         </p:spPr>
+        <p:txBody>
+          <a:bodyPr/>
+          <a:p/>
+        </p:txBody>
       </p:sp>
       <p:sp>
         <p:nvSpPr>
@@ -14781,6 +15528,10 @@
             <a:prstDash val="solid"/>
           </a:ln>
         </p:spPr>
+        <p:txBody>
+          <a:bodyPr/>
+          <a:p/>
+        </p:txBody>
       </p:sp>
       <p:sp>
         <p:nvSpPr>
@@ -14879,6 +15630,10 @@
           </a:solidFill>
           <a:ln/>
         </p:spPr>
+        <p:txBody>
+          <a:bodyPr/>
+          <a:p/>
+        </p:txBody>
       </p:sp>
       <p:sp>
         <p:nvSpPr>
@@ -14970,6 +15725,10 @@
           </a:solidFill>
           <a:ln/>
         </p:spPr>
+        <p:txBody>
+          <a:bodyPr/>
+          <a:p/>
+        </p:txBody>
       </p:sp>
       <p:sp>
         <p:nvSpPr>
@@ -15107,6 +15866,10 @@
           </a:solidFill>
           <a:ln/>
         </p:spPr>
+        <p:txBody>
+          <a:bodyPr/>
+          <a:p/>
+        </p:txBody>
       </p:sp>
       <p:sp>
         <p:nvSpPr>
@@ -15198,6 +15961,10 @@
           </a:solidFill>
           <a:ln/>
         </p:spPr>
+        <p:txBody>
+          <a:bodyPr/>
+          <a:p/>
+        </p:txBody>
       </p:sp>
       <p:sp>
         <p:nvSpPr>
@@ -15335,6 +16102,10 @@
           </a:solidFill>
           <a:ln/>
         </p:spPr>
+        <p:txBody>
+          <a:bodyPr/>
+          <a:p/>
+        </p:txBody>
       </p:sp>
       <p:sp>
         <p:nvSpPr>
@@ -15472,6 +16243,10 @@
           </a:solidFill>
           <a:ln/>
         </p:spPr>
+        <p:txBody>
+          <a:bodyPr/>
+          <a:p/>
+        </p:txBody>
       </p:sp>
       <p:sp>
         <p:nvSpPr>
@@ -15648,6 +16423,10 @@
           </a:solidFill>
           <a:ln/>
         </p:spPr>
+        <p:txBody>
+          <a:bodyPr/>
+          <a:p/>
+        </p:txBody>
       </p:sp>
       <p:sp>
         <p:nvSpPr>
@@ -15739,6 +16518,10 @@
           </a:solidFill>
           <a:ln/>
         </p:spPr>
+        <p:txBody>
+          <a:bodyPr/>
+          <a:p/>
+        </p:txBody>
       </p:sp>
       <p:sp>
         <p:nvSpPr>
@@ -15844,6 +16627,10 @@
             <a:prstDash val="solid"/>
           </a:ln>
         </p:spPr>
+        <p:txBody>
+          <a:bodyPr/>
+          <a:p/>
+        </p:txBody>
       </p:sp>
       <p:sp>
         <p:nvSpPr>
@@ -15966,6 +16753,10 @@
             <a:prstDash val="solid"/>
           </a:ln>
         </p:spPr>
+        <p:txBody>
+          <a:bodyPr/>
+          <a:p/>
+        </p:txBody>
       </p:sp>
       <p:sp>
         <p:nvSpPr>
@@ -16132,6 +16923,10 @@
           </a:solidFill>
           <a:ln/>
         </p:spPr>
+        <p:txBody>
+          <a:bodyPr/>
+          <a:p/>
+        </p:txBody>
       </p:sp>
       <p:sp>
         <p:nvSpPr>
@@ -16223,6 +17018,10 @@
           </a:solidFill>
           <a:ln/>
         </p:spPr>
+        <p:txBody>
+          <a:bodyPr/>
+          <a:p/>
+        </p:txBody>
       </p:sp>
       <p:sp>
         <p:nvSpPr>
@@ -16328,6 +17127,10 @@
             <a:prstDash val="solid"/>
           </a:ln>
         </p:spPr>
+        <p:txBody>
+          <a:bodyPr/>
+          <a:p/>
+        </p:txBody>
       </p:sp>
       <p:sp>
         <p:nvSpPr>
@@ -16511,6 +17314,10 @@
             <a:prstDash val="solid"/>
           </a:ln>
         </p:spPr>
+        <p:txBody>
+          <a:bodyPr/>
+          <a:p/>
+        </p:txBody>
       </p:sp>
       <p:sp>
         <p:nvSpPr>
@@ -16545,7 +17352,7 @@
                 <a:ea typeface="Microsoft YaHei" pitchFamily="34" charset="-122"/>
                 <a:cs typeface="Microsoft YaHei" pitchFamily="34" charset="-120"/>
               </a:rPr>
-              <a:t>现场互动</a:t>
+              <a:t>课后练习</a:t>
             </a:r>
             <a:endParaRPr lang="en-US" sz="1400" dirty="0"/>
           </a:p>
@@ -16609,6 +17416,10 @@
           </a:solidFill>
           <a:ln/>
         </p:spPr>
+        <p:txBody>
+          <a:bodyPr/>
+          <a:p/>
+        </p:txBody>
       </p:sp>
       <p:sp>
         <p:nvSpPr>
@@ -16700,6 +17511,10 @@
           </a:solidFill>
           <a:ln/>
         </p:spPr>
+        <p:txBody>
+          <a:bodyPr/>
+          <a:p/>
+        </p:txBody>
       </p:sp>
       <p:sp>
         <p:nvSpPr>
@@ -16837,6 +17652,10 @@
           </a:solidFill>
           <a:ln/>
         </p:spPr>
+        <p:txBody>
+          <a:bodyPr/>
+          <a:p/>
+        </p:txBody>
       </p:sp>
       <p:sp>
         <p:nvSpPr>
@@ -16928,6 +17747,10 @@
           </a:solidFill>
           <a:ln/>
         </p:spPr>
+        <p:txBody>
+          <a:bodyPr/>
+          <a:p/>
+        </p:txBody>
       </p:sp>
       <p:sp>
         <p:nvSpPr>
@@ -17221,6 +18044,10 @@
           </a:solidFill>
           <a:ln/>
         </p:spPr>
+        <p:txBody>
+          <a:bodyPr/>
+          <a:p/>
+        </p:txBody>
       </p:sp>
       <p:sp>
         <p:nvSpPr>
@@ -17312,6 +18139,10 @@
           </a:solidFill>
           <a:ln/>
         </p:spPr>
+        <p:txBody>
+          <a:bodyPr/>
+          <a:p/>
+        </p:txBody>
       </p:sp>
       <p:sp>
         <p:nvSpPr>
@@ -17417,6 +18248,10 @@
             <a:prstDash val="solid"/>
           </a:ln>
         </p:spPr>
+        <p:txBody>
+          <a:bodyPr/>
+          <a:p/>
+        </p:txBody>
       </p:sp>
       <p:sp>
         <p:nvSpPr>
@@ -17522,6 +18357,10 @@
             <a:prstDash val="solid"/>
           </a:ln>
         </p:spPr>
+        <p:txBody>
+          <a:bodyPr/>
+          <a:p/>
+        </p:txBody>
       </p:sp>
       <p:sp>
         <p:nvSpPr>
@@ -17627,6 +18466,10 @@
             <a:prstDash val="solid"/>
           </a:ln>
         </p:spPr>
+        <p:txBody>
+          <a:bodyPr/>
+          <a:p/>
+        </p:txBody>
       </p:sp>
       <p:sp>
         <p:nvSpPr>
@@ -17725,6 +18568,10 @@
           </a:solidFill>
           <a:ln/>
         </p:spPr>
+        <p:txBody>
+          <a:bodyPr/>
+          <a:p/>
+        </p:txBody>
       </p:sp>
       <p:sp>
         <p:nvSpPr>
@@ -17816,6 +18663,10 @@
           </a:solidFill>
           <a:ln/>
         </p:spPr>
+        <p:txBody>
+          <a:bodyPr/>
+          <a:p/>
+        </p:txBody>
       </p:sp>
       <p:sp>
         <p:nvSpPr>
@@ -17953,6 +18804,10 @@
           </a:solidFill>
           <a:ln/>
         </p:spPr>
+        <p:txBody>
+          <a:bodyPr/>
+          <a:p/>
+        </p:txBody>
       </p:sp>
       <p:sp>
         <p:nvSpPr>
@@ -18090,6 +18945,10 @@
           </a:solidFill>
           <a:ln/>
         </p:spPr>
+        <p:txBody>
+          <a:bodyPr/>
+          <a:p/>
+        </p:txBody>
       </p:sp>
       <p:sp>
         <p:nvSpPr>
@@ -18266,6 +19125,10 @@
           </a:solidFill>
           <a:ln/>
         </p:spPr>
+        <p:txBody>
+          <a:bodyPr/>
+          <a:p/>
+        </p:txBody>
       </p:sp>
       <p:sp>
         <p:nvSpPr>
@@ -18357,6 +19220,10 @@
           </a:solidFill>
           <a:ln/>
         </p:spPr>
+        <p:txBody>
+          <a:bodyPr/>
+          <a:p/>
+        </p:txBody>
       </p:sp>
       <p:sp>
         <p:nvSpPr>
@@ -18462,6 +19329,10 @@
             <a:prstDash val="solid"/>
           </a:ln>
         </p:spPr>
+        <p:txBody>
+          <a:bodyPr/>
+          <a:p/>
+        </p:txBody>
       </p:sp>
       <p:sp>
         <p:nvSpPr>
@@ -18652,6 +19523,10 @@
             <a:prstDash val="solid"/>
           </a:ln>
         </p:spPr>
+        <p:txBody>
+          <a:bodyPr/>
+          <a:p/>
+        </p:txBody>
       </p:sp>
       <p:sp>
         <p:nvSpPr>
@@ -18835,6 +19710,10 @@
           </a:solidFill>
           <a:ln/>
         </p:spPr>
+        <p:txBody>
+          <a:bodyPr/>
+          <a:p/>
+        </p:txBody>
       </p:sp>
       <p:sp>
         <p:nvSpPr>
@@ -18926,6 +19805,10 @@
           </a:solidFill>
           <a:ln/>
         </p:spPr>
+        <p:txBody>
+          <a:bodyPr/>
+          <a:p/>
+        </p:txBody>
       </p:sp>
       <p:sp>
         <p:nvSpPr>
@@ -19031,6 +19914,10 @@
             <a:prstDash val="solid"/>
           </a:ln>
         </p:spPr>
+        <p:txBody>
+          <a:bodyPr/>
+          <a:p/>
+        </p:txBody>
       </p:sp>
       <p:sp>
         <p:nvSpPr>
@@ -19214,6 +20101,10 @@
             <a:prstDash val="solid"/>
           </a:ln>
         </p:spPr>
+        <p:txBody>
+          <a:bodyPr/>
+          <a:p/>
+        </p:txBody>
       </p:sp>
       <p:sp>
         <p:nvSpPr>
@@ -19248,7 +20139,7 @@
                 <a:ea typeface="Microsoft YaHei" pitchFamily="34" charset="-122"/>
                 <a:cs typeface="Microsoft YaHei" pitchFamily="34" charset="-120"/>
               </a:rPr>
-              <a:t>现场互动</a:t>
+              <a:t>课后练习</a:t>
             </a:r>
             <a:endParaRPr lang="en-US" sz="1400" dirty="0"/>
           </a:p>
@@ -19312,6 +20203,10 @@
           </a:solidFill>
           <a:ln/>
         </p:spPr>
+        <p:txBody>
+          <a:bodyPr/>
+          <a:p/>
+        </p:txBody>
       </p:sp>
       <p:sp>
         <p:nvSpPr>
@@ -19403,6 +20298,10 @@
           </a:solidFill>
           <a:ln/>
         </p:spPr>
+        <p:txBody>
+          <a:bodyPr/>
+          <a:p/>
+        </p:txBody>
       </p:sp>
       <p:sp>
         <p:nvSpPr>
@@ -19540,6 +20439,10 @@
           </a:solidFill>
           <a:ln/>
         </p:spPr>
+        <p:txBody>
+          <a:bodyPr/>
+          <a:p/>
+        </p:txBody>
       </p:sp>
       <p:sp>
         <p:nvSpPr>
@@ -19631,6 +20534,10 @@
           </a:solidFill>
           <a:ln/>
         </p:spPr>
+        <p:txBody>
+          <a:bodyPr/>
+          <a:p/>
+        </p:txBody>
       </p:sp>
       <p:sp>
         <p:nvSpPr>
@@ -19782,7 +20689,7 @@
                 <a:ea typeface="Microsoft YaHei" pitchFamily="34" charset="-122"/>
                 <a:cs typeface="Microsoft YaHei" pitchFamily="34" charset="-120"/>
               </a:rPr>
-              <a:t>比如客户账上有一笔'其他应付款——员工挂账'余额800万，该挂'其他应付款'还是该重分类成'应付职工薪酬'？Field同事可能问你一句，你翻准则翻半小时。</a:t>
+              <a:t>比如客户账上有一笔'其他应付款——员工挂账'余额800万，该挂'其他应付款'还是该重新归类成'应付职工薪酬'？Field同事可能问你一句，你翻准则翻半小时。</a:t>
             </a:r>
             <a:endParaRPr lang="en-US" sz="1500" dirty="0"/>
           </a:p>
@@ -19924,6 +20831,10 @@
           </a:solidFill>
           <a:ln/>
         </p:spPr>
+        <p:txBody>
+          <a:bodyPr/>
+          <a:p/>
+        </p:txBody>
       </p:sp>
       <p:sp>
         <p:nvSpPr>
@@ -20015,6 +20926,10 @@
           </a:solidFill>
           <a:ln/>
         </p:spPr>
+        <p:txBody>
+          <a:bodyPr/>
+          <a:p/>
+        </p:txBody>
       </p:sp>
       <p:sp>
         <p:nvSpPr>
@@ -20347,6 +21262,10 @@
           </a:solidFill>
           <a:ln/>
         </p:spPr>
+        <p:txBody>
+          <a:bodyPr/>
+          <a:p/>
+        </p:txBody>
       </p:sp>
       <p:sp>
         <p:nvSpPr>
@@ -20438,6 +21357,10 @@
           </a:solidFill>
           <a:ln/>
         </p:spPr>
+        <p:txBody>
+          <a:bodyPr/>
+          <a:p/>
+        </p:txBody>
       </p:sp>
       <p:sp>
         <p:nvSpPr>
@@ -20543,6 +21466,10 @@
             <a:prstDash val="solid"/>
           </a:ln>
         </p:spPr>
+        <p:txBody>
+          <a:bodyPr/>
+          <a:p/>
+        </p:txBody>
       </p:sp>
       <p:sp>
         <p:nvSpPr>
@@ -20648,6 +21575,10 @@
             <a:prstDash val="solid"/>
           </a:ln>
         </p:spPr>
+        <p:txBody>
+          <a:bodyPr/>
+          <a:p/>
+        </p:txBody>
       </p:sp>
       <p:sp>
         <p:nvSpPr>
@@ -20753,6 +21684,10 @@
             <a:prstDash val="solid"/>
           </a:ln>
         </p:spPr>
+        <p:txBody>
+          <a:bodyPr/>
+          <a:p/>
+        </p:txBody>
       </p:sp>
       <p:sp>
         <p:nvSpPr>
@@ -20851,6 +21786,10 @@
           </a:solidFill>
           <a:ln/>
         </p:spPr>
+        <p:txBody>
+          <a:bodyPr/>
+          <a:p/>
+        </p:txBody>
       </p:sp>
       <p:sp>
         <p:nvSpPr>
@@ -20942,6 +21881,10 @@
           </a:solidFill>
           <a:ln/>
         </p:spPr>
+        <p:txBody>
+          <a:bodyPr/>
+          <a:p/>
+        </p:txBody>
       </p:sp>
       <p:sp>
         <p:nvSpPr>
@@ -21079,6 +22022,10 @@
           </a:solidFill>
           <a:ln/>
         </p:spPr>
+        <p:txBody>
+          <a:bodyPr/>
+          <a:p/>
+        </p:txBody>
       </p:sp>
       <p:sp>
         <p:nvSpPr>
@@ -21216,6 +22163,10 @@
           </a:solidFill>
           <a:ln/>
         </p:spPr>
+        <p:txBody>
+          <a:bodyPr/>
+          <a:p/>
+        </p:txBody>
       </p:sp>
       <p:sp>
         <p:nvSpPr>
@@ -21392,6 +22343,10 @@
           </a:solidFill>
           <a:ln/>
         </p:spPr>
+        <p:txBody>
+          <a:bodyPr/>
+          <a:p/>
+        </p:txBody>
       </p:sp>
       <p:sp>
         <p:nvSpPr>
@@ -21483,6 +22438,10 @@
           </a:solidFill>
           <a:ln/>
         </p:spPr>
+        <p:txBody>
+          <a:bodyPr/>
+          <a:p/>
+        </p:txBody>
       </p:sp>
       <p:sp>
         <p:nvSpPr>
@@ -21588,6 +22547,10 @@
             <a:prstDash val="solid"/>
           </a:ln>
         </p:spPr>
+        <p:txBody>
+          <a:bodyPr/>
+          <a:p/>
+        </p:txBody>
       </p:sp>
       <p:sp>
         <p:nvSpPr>
@@ -21761,6 +22724,10 @@
             <a:prstDash val="solid"/>
           </a:ln>
         </p:spPr>
+        <p:txBody>
+          <a:bodyPr/>
+          <a:p/>
+        </p:txBody>
       </p:sp>
       <p:sp>
         <p:nvSpPr>
@@ -21910,6 +22877,10 @@
           </a:solidFill>
           <a:ln/>
         </p:spPr>
+        <p:txBody>
+          <a:bodyPr/>
+          <a:p/>
+        </p:txBody>
       </p:sp>
       <p:sp>
         <p:nvSpPr>
@@ -22001,6 +22972,10 @@
           </a:solidFill>
           <a:ln/>
         </p:spPr>
+        <p:txBody>
+          <a:bodyPr/>
+          <a:p/>
+        </p:txBody>
       </p:sp>
       <p:sp>
         <p:nvSpPr>
@@ -22106,6 +23081,10 @@
             <a:prstDash val="solid"/>
           </a:ln>
         </p:spPr>
+        <p:txBody>
+          <a:bodyPr/>
+          <a:p/>
+        </p:txBody>
       </p:sp>
       <p:sp>
         <p:nvSpPr>
@@ -22289,6 +23268,10 @@
             <a:prstDash val="solid"/>
           </a:ln>
         </p:spPr>
+        <p:txBody>
+          <a:bodyPr/>
+          <a:p/>
+        </p:txBody>
       </p:sp>
       <p:sp>
         <p:nvSpPr>
@@ -22323,7 +23306,7 @@
                 <a:ea typeface="Microsoft YaHei" pitchFamily="34" charset="-122"/>
                 <a:cs typeface="Microsoft YaHei" pitchFamily="34" charset="-120"/>
               </a:rPr>
-              <a:t>现场互动</a:t>
+              <a:t>课后练习</a:t>
             </a:r>
             <a:endParaRPr lang="en-US" sz="1400" dirty="0"/>
           </a:p>
@@ -22387,6 +23370,10 @@
           </a:solidFill>
           <a:ln/>
         </p:spPr>
+        <p:txBody>
+          <a:bodyPr/>
+          <a:p/>
+        </p:txBody>
       </p:sp>
       <p:sp>
         <p:nvSpPr>
@@ -22478,6 +23465,10 @@
           </a:solidFill>
           <a:ln/>
         </p:spPr>
+        <p:txBody>
+          <a:bodyPr/>
+          <a:p/>
+        </p:txBody>
       </p:sp>
       <p:sp>
         <p:nvSpPr>
@@ -22615,6 +23606,10 @@
           </a:solidFill>
           <a:ln/>
         </p:spPr>
+        <p:txBody>
+          <a:bodyPr/>
+          <a:p/>
+        </p:txBody>
       </p:sp>
       <p:sp>
         <p:nvSpPr>
@@ -22706,6 +23701,10 @@
           </a:solidFill>
           <a:ln/>
         </p:spPr>
+        <p:txBody>
+          <a:bodyPr/>
+          <a:p/>
+        </p:txBody>
       </p:sp>
       <p:sp>
         <p:nvSpPr>
@@ -22960,6 +23959,10 @@
           </a:solidFill>
           <a:ln/>
         </p:spPr>
+        <p:txBody>
+          <a:bodyPr/>
+          <a:p/>
+        </p:txBody>
       </p:sp>
       <p:sp>
         <p:nvSpPr>
@@ -23051,6 +24054,10 @@
           </a:solidFill>
           <a:ln/>
         </p:spPr>
+        <p:txBody>
+          <a:bodyPr/>
+          <a:p/>
+        </p:txBody>
       </p:sp>
       <p:sp>
         <p:nvSpPr>
@@ -23156,6 +24163,10 @@
             <a:prstDash val="solid"/>
           </a:ln>
         </p:spPr>
+        <p:txBody>
+          <a:bodyPr/>
+          <a:p/>
+        </p:txBody>
       </p:sp>
       <p:sp>
         <p:nvSpPr>
@@ -23261,6 +24272,10 @@
             <a:prstDash val="solid"/>
           </a:ln>
         </p:spPr>
+        <p:txBody>
+          <a:bodyPr/>
+          <a:p/>
+        </p:txBody>
       </p:sp>
       <p:sp>
         <p:nvSpPr>
@@ -23366,6 +24381,10 @@
             <a:prstDash val="solid"/>
           </a:ln>
         </p:spPr>
+        <p:txBody>
+          <a:bodyPr/>
+          <a:p/>
+        </p:txBody>
       </p:sp>
       <p:sp>
         <p:nvSpPr>
@@ -23464,6 +24483,10 @@
           </a:solidFill>
           <a:ln/>
         </p:spPr>
+        <p:txBody>
+          <a:bodyPr/>
+          <a:p/>
+        </p:txBody>
       </p:sp>
       <p:sp>
         <p:nvSpPr>
@@ -23555,6 +24578,10 @@
           </a:solidFill>
           <a:ln/>
         </p:spPr>
+        <p:txBody>
+          <a:bodyPr/>
+          <a:p/>
+        </p:txBody>
       </p:sp>
       <p:sp>
         <p:nvSpPr>
@@ -23692,6 +24719,10 @@
           </a:solidFill>
           <a:ln/>
         </p:spPr>
+        <p:txBody>
+          <a:bodyPr/>
+          <a:p/>
+        </p:txBody>
       </p:sp>
       <p:sp>
         <p:nvSpPr>
@@ -23829,6 +24860,10 @@
           </a:solidFill>
           <a:ln/>
         </p:spPr>
+        <p:txBody>
+          <a:bodyPr/>
+          <a:p/>
+        </p:txBody>
       </p:sp>
       <p:sp>
         <p:nvSpPr>
@@ -24005,6 +25040,10 @@
           </a:solidFill>
           <a:ln/>
         </p:spPr>
+        <p:txBody>
+          <a:bodyPr/>
+          <a:p/>
+        </p:txBody>
       </p:sp>
       <p:sp>
         <p:nvSpPr>
@@ -24096,6 +25135,10 @@
           </a:solidFill>
           <a:ln/>
         </p:spPr>
+        <p:txBody>
+          <a:bodyPr/>
+          <a:p/>
+        </p:txBody>
       </p:sp>
       <p:sp>
         <p:nvSpPr>
@@ -24201,6 +25244,10 @@
             <a:prstDash val="solid"/>
           </a:ln>
         </p:spPr>
+        <p:txBody>
+          <a:bodyPr/>
+          <a:p/>
+        </p:txBody>
       </p:sp>
       <p:sp>
         <p:nvSpPr>
@@ -24442,6 +25489,10 @@
             <a:prstDash val="solid"/>
           </a:ln>
         </p:spPr>
+        <p:txBody>
+          <a:bodyPr/>
+          <a:p/>
+        </p:txBody>
       </p:sp>
       <p:sp>
         <p:nvSpPr>
@@ -24608,6 +25659,10 @@
           </a:solidFill>
           <a:ln/>
         </p:spPr>
+        <p:txBody>
+          <a:bodyPr/>
+          <a:p/>
+        </p:txBody>
       </p:sp>
       <p:sp>
         <p:nvSpPr>
@@ -24699,6 +25754,10 @@
           </a:solidFill>
           <a:ln/>
         </p:spPr>
+        <p:txBody>
+          <a:bodyPr/>
+          <a:p/>
+        </p:txBody>
       </p:sp>
       <p:sp>
         <p:nvSpPr>
@@ -24804,6 +25863,10 @@
             <a:prstDash val="solid"/>
           </a:ln>
         </p:spPr>
+        <p:txBody>
+          <a:bodyPr/>
+          <a:p/>
+        </p:txBody>
       </p:sp>
       <p:sp>
         <p:nvSpPr>
@@ -24909,6 +25972,10 @@
             <a:prstDash val="solid"/>
           </a:ln>
         </p:spPr>
+        <p:txBody>
+          <a:bodyPr/>
+          <a:p/>
+        </p:txBody>
       </p:sp>
       <p:sp>
         <p:nvSpPr>
@@ -25014,6 +26081,10 @@
             <a:prstDash val="solid"/>
           </a:ln>
         </p:spPr>
+        <p:txBody>
+          <a:bodyPr/>
+          <a:p/>
+        </p:txBody>
       </p:sp>
       <p:sp>
         <p:nvSpPr>
@@ -25112,6 +26183,10 @@
           </a:solidFill>
           <a:ln/>
         </p:spPr>
+        <p:txBody>
+          <a:bodyPr/>
+          <a:p/>
+        </p:txBody>
       </p:sp>
       <p:sp>
         <p:nvSpPr>
@@ -25203,6 +26278,10 @@
           </a:solidFill>
           <a:ln/>
         </p:spPr>
+        <p:txBody>
+          <a:bodyPr/>
+          <a:p/>
+        </p:txBody>
       </p:sp>
       <p:sp>
         <p:nvSpPr>
@@ -25308,6 +26387,10 @@
             <a:prstDash val="solid"/>
           </a:ln>
         </p:spPr>
+        <p:txBody>
+          <a:bodyPr/>
+          <a:p/>
+        </p:txBody>
       </p:sp>
       <p:sp>
         <p:nvSpPr>
@@ -25491,6 +26574,10 @@
             <a:prstDash val="solid"/>
           </a:ln>
         </p:spPr>
+        <p:txBody>
+          <a:bodyPr/>
+          <a:p/>
+        </p:txBody>
       </p:sp>
       <p:sp>
         <p:nvSpPr>
@@ -25525,7 +26612,7 @@
                 <a:ea typeface="Microsoft YaHei" pitchFamily="34" charset="-122"/>
                 <a:cs typeface="Microsoft YaHei" pitchFamily="34" charset="-120"/>
               </a:rPr>
-              <a:t>现场互动</a:t>
+              <a:t>课后练习</a:t>
             </a:r>
             <a:endParaRPr lang="en-US" sz="1400" dirty="0"/>
           </a:p>
@@ -25589,6 +26676,10 @@
           </a:solidFill>
           <a:ln/>
         </p:spPr>
+        <p:txBody>
+          <a:bodyPr/>
+          <a:p/>
+        </p:txBody>
       </p:sp>
       <p:sp>
         <p:nvSpPr>
@@ -25680,6 +26771,10 @@
           </a:solidFill>
           <a:ln/>
         </p:spPr>
+        <p:txBody>
+          <a:bodyPr/>
+          <a:p/>
+        </p:txBody>
       </p:sp>
       <p:sp>
         <p:nvSpPr>
@@ -25817,6 +26912,10 @@
           </a:solidFill>
           <a:ln/>
         </p:spPr>
+        <p:txBody>
+          <a:bodyPr/>
+          <a:p/>
+        </p:txBody>
       </p:sp>
       <p:sp>
         <p:nvSpPr>
@@ -25929,7 +27028,7 @@
                 <a:ea typeface="Microsoft YaHei" pitchFamily="34" charset="-122"/>
                 <a:cs typeface="Microsoft YaHei" pitchFamily="34" charset="-120"/>
               </a:rPr>
-              <a:t>不要只搜一个科目名，要把问题拆解为'科目 + 场景 + 准则/年份'。比如不要搜'应付账款'，要搜'预付账款 和其他应收款 区别 会计准则'。</a:t>
+              <a:t>不要只搜单个关键词，要把问题拆解为'主题 + 场景 + 准则/年份'。比如不要搜'固定资产折旧'，要搜'固定资产 年数总和法 适用条件 CAS4'。</a:t>
             </a:r>
             <a:endParaRPr lang="en-US" sz="1200" dirty="0"/>
           </a:p>
@@ -25954,6 +27053,10 @@
           </a:solidFill>
           <a:ln/>
         </p:spPr>
+        <p:txBody>
+          <a:bodyPr/>
+          <a:p/>
+        </p:txBody>
       </p:sp>
       <p:sp>
         <p:nvSpPr>
@@ -26130,6 +27233,10 @@
           </a:solidFill>
           <a:ln/>
         </p:spPr>
+        <p:txBody>
+          <a:bodyPr/>
+          <a:p/>
+        </p:txBody>
       </p:sp>
       <p:sp>
         <p:nvSpPr>
@@ -26221,6 +27328,10 @@
           </a:solidFill>
           <a:ln/>
         </p:spPr>
+        <p:txBody>
+          <a:bodyPr/>
+          <a:p/>
+        </p:txBody>
       </p:sp>
       <p:sp>
         <p:nvSpPr>
@@ -26326,6 +27437,10 @@
             <a:prstDash val="solid"/>
           </a:ln>
         </p:spPr>
+        <p:txBody>
+          <a:bodyPr/>
+          <a:p/>
+        </p:txBody>
       </p:sp>
       <p:sp>
         <p:nvSpPr>
@@ -26399,7 +27514,7 @@
                 <a:ea typeface="Microsoft YaHei" pitchFamily="34" charset="-122"/>
                 <a:cs typeface="Microsoft YaHei" pitchFamily="34" charset="-120"/>
               </a:rPr>
-              <a:t>指令1（查科目区分）：site:mof.gov.cn '预付账款' '其他应收款' 区别 会计准则</a:t>
+              <a:t>指令1（查准则规定）：site:mof.gov.cn '固定资产' '折旧方法' 变更 条件 CAS4</a:t>
             </a:r>
             <a:endParaRPr lang="en-US" sz="1200" dirty="0"/>
           </a:p>
@@ -26482,6 +27597,10 @@
             <a:prstDash val="solid"/>
           </a:ln>
         </p:spPr>
+        <p:txBody>
+          <a:bodyPr/>
+          <a:p/>
+        </p:txBody>
       </p:sp>
       <p:sp>
         <p:nvSpPr>
@@ -26631,6 +27750,10 @@
           </a:solidFill>
           <a:ln/>
         </p:spPr>
+        <p:txBody>
+          <a:bodyPr/>
+          <a:p/>
+        </p:txBody>
       </p:sp>
       <p:sp>
         <p:nvSpPr>
@@ -26722,6 +27845,10 @@
           </a:solidFill>
           <a:ln/>
         </p:spPr>
+        <p:txBody>
+          <a:bodyPr/>
+          <a:p/>
+        </p:txBody>
       </p:sp>
       <p:sp>
         <p:nvSpPr>
@@ -26827,6 +27954,10 @@
             <a:prstDash val="solid"/>
           </a:ln>
         </p:spPr>
+        <p:txBody>
+          <a:bodyPr/>
+          <a:p/>
+        </p:txBody>
       </p:sp>
       <p:sp>
         <p:nvSpPr>
@@ -27010,6 +28141,10 @@
             <a:prstDash val="solid"/>
           </a:ln>
         </p:spPr>
+        <p:txBody>
+          <a:bodyPr/>
+          <a:p/>
+        </p:txBody>
       </p:sp>
       <p:sp>
         <p:nvSpPr>
@@ -27044,7 +28179,7 @@
                 <a:ea typeface="Microsoft YaHei" pitchFamily="34" charset="-122"/>
                 <a:cs typeface="Microsoft YaHei" pitchFamily="34" charset="-120"/>
               </a:rPr>
-              <a:t>现场互动</a:t>
+              <a:t>课后练习</a:t>
             </a:r>
             <a:endParaRPr lang="en-US" sz="1400" dirty="0"/>
           </a:p>
@@ -27083,7 +28218,7 @@
                 <a:ea typeface="Microsoft YaHei" pitchFamily="34" charset="-122"/>
                 <a:cs typeface="Microsoft YaHei" pitchFamily="34" charset="-120"/>
               </a:rPr>
-              <a:t>给出一个具体场景：客户科目'其他应付款——员工挂账'余额800万，3个小组分别用不同搜索词去查，对比谁的结果最先找到权威依据，讨论各自的搜索策略优劣。</a:t>
+              <a:t>案例：客户固定资产原值5000万，采用直线法折旧，你怀疑残值率设定不合理。分别用3种不同搜索策略查证残值率的准则规定，对比哪种策略最快找到权威依据。</a:t>
             </a:r>
             <a:endParaRPr lang="en-US" sz="1200" dirty="0"/>
           </a:p>
@@ -27108,6 +28243,10 @@
           </a:solidFill>
           <a:ln/>
         </p:spPr>
+        <p:txBody>
+          <a:bodyPr/>
+          <a:p/>
+        </p:txBody>
       </p:sp>
       <p:sp>
         <p:nvSpPr>
@@ -27199,6 +28338,10 @@
           </a:solidFill>
           <a:ln/>
         </p:spPr>
+        <p:txBody>
+          <a:bodyPr/>
+          <a:p/>
+        </p:txBody>
       </p:sp>
       <p:sp>
         <p:nvSpPr>
@@ -27311,7 +28454,7 @@
                 <a:ea typeface="Microsoft YaHei" pitchFamily="34" charset="-122"/>
                 <a:cs typeface="Microsoft YaHei" pitchFamily="34" charset="-120"/>
               </a:rPr>
-              <a:t>审计分析程序与数据建模自动化</a:t>
+              <a:t>常用Excel分析辅助功能</a:t>
             </a:r>
             <a:endParaRPr lang="en-US" sz="1600" dirty="0"/>
           </a:p>
@@ -27336,6 +28479,10 @@
           </a:solidFill>
           <a:ln/>
         </p:spPr>
+        <p:txBody>
+          <a:bodyPr/>
+          <a:p/>
+        </p:txBody>
       </p:sp>
       <p:sp>
         <p:nvSpPr>
